--- a/docs/submission/项目演示.pptx
+++ b/docs/submission/项目演示.pptx
@@ -2141,7 +2141,7 @@
                 <a:ea typeface="微软雅黑" panose="020B0503020204020204" pitchFamily="34" charset="-122"/>
                 <a:cs typeface="微软雅黑" panose="020B0503020204020204" pitchFamily="34" charset="-120"/>
               </a:rPr>
-              <a:t>模拟面试全流程闭环  |  结构化题库 297 题 · 19 个岗位大类  |  零密钥可演示</a:t>
+              <a:t>模拟面试全流程闭环  |  结构化题库 321 题 · 20 个岗位大类  |  零密钥可演示</a:t>
             </a:r>
             <a:endParaRPr lang="en-US" sz="1150" dirty="0"/>
           </a:p>
@@ -6420,6 +6420,14 @@
               </a:rPr>
               <a:t>10  TEAM</a:t>
             </a:r>
+            <a:endParaRPr lang="en-US" sz="1050" kern="0" spc="120" dirty="0">
+              <a:solidFill>
+                <a:srgbClr val="C7A252"/>
+              </a:solidFill>
+              <a:latin typeface="微软雅黑" panose="020B0503020204020204" pitchFamily="34" charset="-122"/>
+              <a:ea typeface="微软雅黑" panose="020B0503020204020204" pitchFamily="34" charset="-122"/>
+              <a:cs typeface="微软雅黑" panose="020B0503020204020204" pitchFamily="34" charset="-120"/>
+            </a:endParaRPr>
           </a:p>
         </p:txBody>
       </p:sp>
@@ -6460,6 +6468,11 @@
               </a:rPr>
               <a:t>组员分工</a:t>
             </a:r>
+            <a:endParaRPr lang="en-US" sz="2700" kern="0" spc="150" dirty="0">
+              <a:latin typeface="宋体" panose="02010600030101010101" pitchFamily="2" charset="-122"/>
+              <a:ea typeface="宋体" panose="02010600030101010101" pitchFamily="2" charset="-122"/>
+              <a:cs typeface="宋体" panose="02010600030101010101" pitchFamily="34" charset="-120"/>
+            </a:endParaRPr>
           </a:p>
         </p:txBody>
       </p:sp>
